--- a/docs/重难题型/files/1_方程不等式的实际应用.pptx
+++ b/docs/重难题型/files/1_方程不等式的实际应用.pptx
@@ -508,7 +508,7 @@
           <a:p>
             <a:r>
               <a:rPr lang="en-US" dirty="0"/>
-              <a:t/>
+              <a:t>_fontSize: 80px</a:t>
             </a:r>
             <a:endParaRPr lang="en-US" dirty="0"/>
           </a:p>
